--- a/Lectures/Lecture11.pptx
+++ b/Lectures/Lecture11.pptx
@@ -347,7 +347,7 @@
           <a:p>
             <a:fld id="{CBA08D16-15DC-4E25-BDC3-F25146157B16}" type="datetimeFigureOut">
               <a:rPr lang="ru-RU" smtClean="0"/>
-              <a:t>19.11.2025</a:t>
+              <a:t>14.10.2026</a:t>
             </a:fld>
             <a:endParaRPr lang="ru-RU"/>
           </a:p>
@@ -743,7 +743,7 @@
           <a:p>
             <a:fld id="{FCEC8293-DB51-454A-BE81-EC8FCB31EBA2}" type="datetime1">
               <a:rPr lang="ru-RU" smtClean="0"/>
-              <a:t>19.11.2025</a:t>
+              <a:t>14.10.2026</a:t>
             </a:fld>
             <a:endParaRPr lang="ru-RU"/>
           </a:p>
@@ -914,7 +914,7 @@
           <a:p>
             <a:fld id="{241C87B1-1C35-4DBD-BC18-2BC72E776603}" type="datetime1">
               <a:rPr lang="ru-RU" smtClean="0"/>
-              <a:t>19.11.2025</a:t>
+              <a:t>14.10.2026</a:t>
             </a:fld>
             <a:endParaRPr lang="ru-RU"/>
           </a:p>
@@ -1095,7 +1095,7 @@
           <a:p>
             <a:fld id="{3134C275-26C0-42CD-9111-9ADE65922AF9}" type="datetime1">
               <a:rPr lang="ru-RU" smtClean="0"/>
-              <a:t>19.11.2025</a:t>
+              <a:t>14.10.2026</a:t>
             </a:fld>
             <a:endParaRPr lang="ru-RU"/>
           </a:p>
@@ -1266,7 +1266,7 @@
           <a:p>
             <a:fld id="{C1A9A50B-C350-45F5-8AAB-ADB9E670AF2E}" type="datetime1">
               <a:rPr lang="ru-RU" smtClean="0"/>
-              <a:t>19.11.2025</a:t>
+              <a:t>14.10.2026</a:t>
             </a:fld>
             <a:endParaRPr lang="ru-RU"/>
           </a:p>
@@ -1514,7 +1514,7 @@
           <a:p>
             <a:fld id="{089688C9-348F-42F9-B6C0-5990DDE0C5B2}" type="datetime1">
               <a:rPr lang="ru-RU" smtClean="0"/>
-              <a:t>19.11.2025</a:t>
+              <a:t>14.10.2026</a:t>
             </a:fld>
             <a:endParaRPr lang="ru-RU"/>
           </a:p>
@@ -1746,7 +1746,7 @@
           <a:p>
             <a:fld id="{684AFD8F-6DD9-4AD3-A505-FDC3F5C5F3F6}" type="datetime1">
               <a:rPr lang="ru-RU" smtClean="0"/>
-              <a:t>19.11.2025</a:t>
+              <a:t>14.10.2026</a:t>
             </a:fld>
             <a:endParaRPr lang="ru-RU"/>
           </a:p>
@@ -2113,7 +2113,7 @@
           <a:p>
             <a:fld id="{63551EFE-4D02-45EB-A747-8B6F047B5AA0}" type="datetime1">
               <a:rPr lang="ru-RU" smtClean="0"/>
-              <a:t>19.11.2025</a:t>
+              <a:t>14.10.2026</a:t>
             </a:fld>
             <a:endParaRPr lang="ru-RU"/>
           </a:p>
@@ -2233,7 +2233,7 @@
           <a:p>
             <a:fld id="{813A9F34-E5CD-4B8F-AA9E-889C84372B20}" type="datetime1">
               <a:rPr lang="ru-RU" smtClean="0"/>
-              <a:t>19.11.2025</a:t>
+              <a:t>14.10.2026</a:t>
             </a:fld>
             <a:endParaRPr lang="ru-RU"/>
           </a:p>
@@ -2331,7 +2331,7 @@
           <a:p>
             <a:fld id="{51224D22-9B29-44A6-8E82-95FC492DEDC1}" type="datetime1">
               <a:rPr lang="ru-RU" smtClean="0"/>
-              <a:t>19.11.2025</a:t>
+              <a:t>14.10.2026</a:t>
             </a:fld>
             <a:endParaRPr lang="ru-RU"/>
           </a:p>
@@ -2609,7 +2609,7 @@
           <a:p>
             <a:fld id="{91D1034F-4441-48A1-BDC0-25EA1022324A}" type="datetime1">
               <a:rPr lang="ru-RU" smtClean="0"/>
-              <a:t>19.11.2025</a:t>
+              <a:t>14.10.2026</a:t>
             </a:fld>
             <a:endParaRPr lang="ru-RU"/>
           </a:p>
@@ -2864,7 +2864,7 @@
           <a:p>
             <a:fld id="{B0FFDE79-B627-473B-AE17-4C65BD2495F7}" type="datetime1">
               <a:rPr lang="ru-RU" smtClean="0"/>
-              <a:t>19.11.2025</a:t>
+              <a:t>14.10.2026</a:t>
             </a:fld>
             <a:endParaRPr lang="ru-RU"/>
           </a:p>
@@ -3078,7 +3078,7 @@
           <a:p>
             <a:fld id="{11CA537A-1B8C-47BA-9BA6-7CE3FAFDA8BE}" type="datetime1">
               <a:rPr lang="ru-RU" smtClean="0"/>
-              <a:t>19.11.2025</a:t>
+              <a:t>14.10.2026</a:t>
             </a:fld>
             <a:endParaRPr lang="ru-RU"/>
           </a:p>
@@ -3576,36 +3576,6 @@
           </a:p>
         </p:txBody>
       </p:sp>
-      <p:pic>
-        <p:nvPicPr>
-          <p:cNvPr id="4" name="Рисунок 3">
-            <a:extLst>
-              <a:ext uri="{FF2B5EF4-FFF2-40B4-BE49-F238E27FC236}">
-                <a16:creationId xmlns:a16="http://schemas.microsoft.com/office/drawing/2014/main" id="{1FEA7840-6D5C-436A-A8DE-640ECC5C5422}"/>
-              </a:ext>
-            </a:extLst>
-          </p:cNvPr>
-          <p:cNvPicPr>
-            <a:picLocks noChangeAspect="1"/>
-          </p:cNvPicPr>
-          <p:nvPr/>
-        </p:nvPicPr>
-        <p:blipFill>
-          <a:blip r:embed="rId2"/>
-          <a:stretch>
-            <a:fillRect/>
-          </a:stretch>
-        </p:blipFill>
-        <p:spPr>
-          <a:xfrm>
-            <a:off x="9375706" y="3135124"/>
-            <a:ext cx="1895475" cy="1933575"/>
-          </a:xfrm>
-          <a:prstGeom prst="rect">
-            <a:avLst/>
-          </a:prstGeom>
-        </p:spPr>
-      </p:pic>
     </p:spTree>
     <p:extLst>
       <p:ext uri="{BB962C8B-B14F-4D97-AF65-F5344CB8AC3E}">
